--- a/docs/workflow-design-b-route.pptx
+++ b/docs/workflow-design-b-route.pptx
@@ -4632,7 +4632,7 @@
               </a:defRPr>
             </a:pPr>
             <a:r>
-              <a:t>照合キー: office_member_id (従業員) × 金額 × 日付</a:t>
+              <a:t>照合キー: office_member_id × 金額 × 日付（±7日）</a:t>
             </a:r>
           </a:p>
         </p:txBody>
@@ -5979,7 +5979,7 @@
               </a:defRPr>
             </a:pPr>
             <a:r>
-              <a:t>office_member_id で従業員を確実に特定（card_last4不要）</a:t>
+              <a:t>office_member_id で従業員を確実に特定（office_member_id不要）</a:t>
             </a:r>
           </a:p>
         </p:txBody>
@@ -8449,7 +8449,7 @@
               </a:defRPr>
             </a:pPr>
             <a:r>
-              <a:t>✓ MF経費APIで office_member_id が取得可能（実機確認済み）</a:t>
+              <a:t>✓ office_member_id ベース照合(card-matcher-v2)実装済み</a:t>
             </a:r>
           </a:p>
           <a:p>
@@ -8464,7 +8464,7 @@
               </a:defRPr>
             </a:pPr>
             <a:r>
-              <a:t>□ MFビジネスカード → MF経費 の自動連携設定方法</a:t>
+              <a:t>検証中: MFビジネスカード → MF経費 の自動連携設定</a:t>
             </a:r>
           </a:p>
           <a:p>
@@ -8494,7 +8494,7 @@
               </a:defRPr>
             </a:pPr>
             <a:r>
-              <a:t>□ カード明細の反映タイミング（即時 or 翌営業日）</a:t>
+              <a:t>検証中: カード明細の反映タイミング</a:t>
             </a:r>
           </a:p>
           <a:p>
@@ -8509,7 +8509,7 @@
               </a:defRPr>
             </a:pPr>
             <a:r>
-              <a:t>□ 同日同額の複数決済の区別方法</a:t>
+              <a:t>検証中: 同日同額の複数決済の区別方法</a:t>
             </a:r>
           </a:p>
           <a:p>
@@ -8524,7 +8524,7 @@
               </a:defRPr>
             </a:pPr>
             <a:r>
-              <a:t>□ 返金・キャンセル時の明細形式</a:t>
+              <a:t>検証中: 返金・キャンセル時の明細形式</a:t>
             </a:r>
           </a:p>
           <a:p>
@@ -8539,7 +8539,7 @@
               </a:defRPr>
             </a:pPr>
             <a:r>
-              <a:t>□ MF会計Plus の自動仕訳ルールをOFFにできるか</a:t>
+              <a:t>検証中: MF会計Plus の自動仕訳ルールOFF確認</a:t>
             </a:r>
           </a:p>
           <a:p>
@@ -8554,7 +8554,7 @@
               </a:defRPr>
             </a:pPr>
             <a:r>
-              <a:t>□ 二重計上防止のための一意キー設計</a:t>
+              <a:t>実装済み: PO番号による仕訳冪等性チェック</a:t>
             </a:r>
           </a:p>
           <a:p>
@@ -8569,7 +8569,7 @@
               </a:defRPr>
             </a:pPr>
             <a:r>
-              <a:t>□ 立替精算のフロー（MF経費を通すか直接仕訳か）</a:t>
+              <a:t>実装済み: /expense/new → MF経費経由精算</a:t>
             </a:r>
           </a:p>
         </p:txBody>
@@ -10222,7 +10222,7 @@
               </a:defRPr>
             </a:pPr>
             <a:r>
-              <a:t>Layer 2: 購買管理システム（司令塔）</a:t>
+              <a:t>Layer 2: 購買管理システム（司令塔 / Supabase Postgres）</a:t>
             </a:r>
           </a:p>
         </p:txBody>
@@ -10276,7 +10276,7 @@
               </a:defRPr>
             </a:pPr>
             <a:r>
-              <a:t>申請・承認・予測テーブル・照合エンジン・仕訳作成</a:t>
+              <a:t>申請・承認・予測テーブル(predicted_transactions)・照合エンジン(card-matcher-v2)・仕訳作成</a:t>
             </a:r>
           </a:p>
         </p:txBody>

--- a/docs/workflow-design-b-route.pptx
+++ b/docs/workflow-design-b-route.pptx
@@ -31,6 +31,7 @@
     <p:sldId id="279" r:id="rId30"/>
     <p:sldId id="280" r:id="rId31"/>
     <p:sldId id="281" r:id="rId32"/>
+    <p:sldId id="282" r:id="rId33"/>
   </p:sldIdLst>
   <p:sldSz cx="12191695" cy="6858000" type="screen4x3"/>
   <p:notesSz cx="6858000" cy="9144000"/>
@@ -9853,6 +9854,139 @@
 </p:sld>
 </file>
 
+<file path=ppt/slides/slide27.xml><?xml version="1.0" encoding="utf-8"?>
+<p:sld xmlns:a="http://schemas.openxmlformats.org/drawingml/2006/main" xmlns:p="http://schemas.openxmlformats.org/presentationml/2006/main" xmlns:r="http://schemas.openxmlformats.org/officeDocument/2006/relationships">
+  <p:cSld>
+    <p:spTree>
+      <p:nvGrpSpPr>
+        <p:cNvPr id="1" name=""/>
+        <p:cNvGrpSpPr/>
+        <p:nvPr/>
+      </p:nvGrpSpPr>
+      <p:grpSpPr/>
+      <p:sp>
+        <p:nvSpPr>
+          <p:cNvPr id="2" name="Title 1"/>
+          <p:cNvSpPr>
+            <a:spLocks noGrp="1"/>
+          </p:cNvSpPr>
+          <p:nvPr>
+            <p:ph type="title"/>
+          </p:nvPr>
+        </p:nvSpPr>
+        <p:spPr/>
+        <p:txBody>
+          <a:bodyPr/>
+          <a:lstStyle/>
+          <a:p>
+            <a:r>
+              <a:rPr sz="2800" b="1"/>
+              <a:t>障害対策・運用基盤（実装済み）</a:t>
+            </a:r>
+          </a:p>
+        </p:txBody>
+      </p:sp>
+      <p:sp>
+        <p:nvSpPr>
+          <p:cNvPr id="3" name="Content Placeholder 2"/>
+          <p:cNvSpPr>
+            <a:spLocks noGrp="1"/>
+          </p:cNvSpPr>
+          <p:nvPr>
+            <p:ph idx="1"/>
+          </p:nvPr>
+        </p:nvSpPr>
+        <p:spPr/>
+        <p:txBody>
+          <a:bodyPr/>
+          <a:lstStyle/>
+          <a:p>
+            <a:pPr>
+              <a:spcAft>
+                <a:spcPts val="600"/>
+              </a:spcAft>
+              <a:defRPr sz="1600"/>
+            </a:pPr>
+            <a:r>
+              <a:t>監査ログ: 全ステータス変更を audit_log テーブルに自動記録</a:t>
+            </a:r>
+          </a:p>
+          <a:p>
+            <a:pPr>
+              <a:spcAft>
+                <a:spcPts val="600"/>
+              </a:spcAft>
+              <a:defRPr sz="1600"/>
+            </a:pPr>
+            <a:r>
+              <a:t>リトライ+DLQ: 指数バックオフ(4回) → dead_letter_queue → OPS通知</a:t>
+            </a:r>
+          </a:p>
+          <a:p>
+            <a:pPr>
+              <a:spcAft>
+                <a:spcPts val="600"/>
+              </a:spcAft>
+              <a:defRPr sz="1600"/>
+            </a:pPr>
+            <a:r>
+              <a:t>日次バックアップ: Supabase全テーブル → GDrive JSON（永久保持）</a:t>
+            </a:r>
+          </a:p>
+          <a:p>
+            <a:pPr>
+              <a:spcAft>
+                <a:spcPts val="600"/>
+              </a:spcAft>
+              <a:defRPr sz="1600"/>
+            </a:pPr>
+            <a:r>
+              <a:t>勘定科目学習: account_corrections → RAGコンテキスト注入</a:t>
+            </a:r>
+          </a:p>
+          <a:p>
+            <a:pPr>
+              <a:spcAft>
+                <a:spcPts val="600"/>
+              </a:spcAft>
+              <a:defRPr sz="1600"/>
+            </a:pPr>
+            <a:r>
+              <a:t>全文検索: pg_trgm + GINインデックス（品目名/仕入先/備考）</a:t>
+            </a:r>
+          </a:p>
+          <a:p>
+            <a:pPr>
+              <a:spcAft>
+                <a:spcPts val="600"/>
+              </a:spcAft>
+              <a:defRPr sz="1600"/>
+            </a:pPr>
+            <a:r>
+              <a:t>Slack AI: /askコマンド → Claude Haiku + 購買データRAG</a:t>
+            </a:r>
+          </a:p>
+          <a:p>
+            <a:pPr>
+              <a:spcAft>
+                <a:spcPts val="600"/>
+              </a:spcAft>
+              <a:defRPr sz="1600"/>
+            </a:pPr>
+            <a:r>
+              <a:t>出張統制: 月次cron → 差異検知・未申請・重複・部門別コスト</a:t>
+            </a:r>
+          </a:p>
+        </p:txBody>
+      </p:sp>
+    </p:spTree>
+  </p:cSld>
+  <p:clrMapOvr>
+    <a:masterClrMapping/>
+  </p:clrMapOvr>
+</p:sld>
+</file>
+
 <file path=ppt/slides/slide3.xml><?xml version="1.0" encoding="utf-8"?>
 <p:sld xmlns:a="http://schemas.openxmlformats.org/drawingml/2006/main" xmlns:p="http://schemas.openxmlformats.org/presentationml/2006/main" xmlns:r="http://schemas.openxmlformats.org/officeDocument/2006/relationships">
   <p:cSld>
